--- a/public/videos/repositories/retro-jihanki-live/retro-jihanki-live-tech-preview.pptx
+++ b/public/videos/repositories/retro-jihanki-live/retro-jihanki-live-tech-preview.pptx
@@ -134,7 +134,7 @@
           <p:cNvPr id="2" name="タイトル 1">
             <a:extLst>
               <a:ext uri="{FF2B5EF4-FFF2-40B4-BE49-F238E27FC236}">
-                <a16:creationId xmlns:a16="http://schemas.microsoft.com/office/drawing/2014/main" id="{95851A57-D23B-3B66-6378-71A98BB9DDB0}"/>
+                <a16:creationId xmlns:a16="http://schemas.microsoft.com/office/drawing/2014/main" id="{D74A25BC-B642-03C2-416A-1EC6172C322F}"/>
               </a:ext>
             </a:extLst>
           </p:cNvPr>
@@ -171,7 +171,7 @@
           <p:cNvPr id="3" name="字幕 2">
             <a:extLst>
               <a:ext uri="{FF2B5EF4-FFF2-40B4-BE49-F238E27FC236}">
-                <a16:creationId xmlns:a16="http://schemas.microsoft.com/office/drawing/2014/main" id="{971B0E3B-92DB-5381-5B66-A0145514A1E1}"/>
+                <a16:creationId xmlns:a16="http://schemas.microsoft.com/office/drawing/2014/main" id="{E27C13B5-C648-5519-888C-9B33BD577637}"/>
               </a:ext>
             </a:extLst>
           </p:cNvPr>
@@ -241,7 +241,7 @@
           <p:cNvPr id="4" name="日付プレースホルダー 3">
             <a:extLst>
               <a:ext uri="{FF2B5EF4-FFF2-40B4-BE49-F238E27FC236}">
-                <a16:creationId xmlns:a16="http://schemas.microsoft.com/office/drawing/2014/main" id="{1C88D20E-465F-0203-04CF-C1C664F238DF}"/>
+                <a16:creationId xmlns:a16="http://schemas.microsoft.com/office/drawing/2014/main" id="{4B5B78DC-3152-8F92-D9CD-A0295ECA905A}"/>
               </a:ext>
             </a:extLst>
           </p:cNvPr>
@@ -257,7 +257,7 @@
           <a:bodyPr/>
           <a:lstStyle/>
           <a:p>
-            <a:fld id="{D74A895A-4D88-4530-AAF8-1E2C34CB1223}" type="datetimeFigureOut">
+            <a:fld id="{3F65969E-335A-4CC9-BC32-B371395EF5F3}" type="datetimeFigureOut">
               <a:rPr kumimoji="1" lang="ja-JP" altLang="en-US" smtClean="0"/>
               <a:t>2026/7/30</a:t>
             </a:fld>
@@ -270,7 +270,7 @@
           <p:cNvPr id="5" name="フッター プレースホルダー 4">
             <a:extLst>
               <a:ext uri="{FF2B5EF4-FFF2-40B4-BE49-F238E27FC236}">
-                <a16:creationId xmlns:a16="http://schemas.microsoft.com/office/drawing/2014/main" id="{EE8333BA-F75E-8173-69C2-3E0964A75F19}"/>
+                <a16:creationId xmlns:a16="http://schemas.microsoft.com/office/drawing/2014/main" id="{0B5D1F4B-F572-C717-7159-968553F352E9}"/>
               </a:ext>
             </a:extLst>
           </p:cNvPr>
@@ -295,7 +295,7 @@
           <p:cNvPr id="6" name="スライド番号プレースホルダー 5">
             <a:extLst>
               <a:ext uri="{FF2B5EF4-FFF2-40B4-BE49-F238E27FC236}">
-                <a16:creationId xmlns:a16="http://schemas.microsoft.com/office/drawing/2014/main" id="{F3BBF3ED-00ED-02BF-DBA2-6BE31041D6FE}"/>
+                <a16:creationId xmlns:a16="http://schemas.microsoft.com/office/drawing/2014/main" id="{7F2AFFCE-FC1F-2DB4-057E-CD9ECD17AAA5}"/>
               </a:ext>
             </a:extLst>
           </p:cNvPr>
@@ -311,7 +311,7 @@
           <a:bodyPr/>
           <a:lstStyle/>
           <a:p>
-            <a:fld id="{520367FA-7816-4E51-A6DB-2AD2D8CD9123}" type="slidenum">
+            <a:fld id="{785F6CDA-CF1A-4248-ABB5-45C1D389B7E6}" type="slidenum">
               <a:rPr kumimoji="1" lang="ja-JP" altLang="en-US" smtClean="0"/>
               <a:t>‹#›</a:t>
             </a:fld>
@@ -322,7 +322,7 @@
     </p:spTree>
     <p:extLst>
       <p:ext uri="{BB962C8B-B14F-4D97-AF65-F5344CB8AC3E}">
-        <p14:creationId xmlns:p14="http://schemas.microsoft.com/office/powerpoint/2010/main" val="3480518413"/>
+        <p14:creationId xmlns:p14="http://schemas.microsoft.com/office/powerpoint/2010/main" val="3374811598"/>
       </p:ext>
     </p:extLst>
   </p:cSld>
@@ -354,7 +354,7 @@
           <p:cNvPr id="2" name="タイトル 1">
             <a:extLst>
               <a:ext uri="{FF2B5EF4-FFF2-40B4-BE49-F238E27FC236}">
-                <a16:creationId xmlns:a16="http://schemas.microsoft.com/office/drawing/2014/main" id="{61404230-7BE2-0239-2E1F-AF9ACC17759D}"/>
+                <a16:creationId xmlns:a16="http://schemas.microsoft.com/office/drawing/2014/main" id="{F82CE3E9-B9A5-7C55-AD39-CC68C3CB82E7}"/>
               </a:ext>
             </a:extLst>
           </p:cNvPr>
@@ -382,7 +382,7 @@
           <p:cNvPr id="3" name="縦書きテキスト プレースホルダー 2">
             <a:extLst>
               <a:ext uri="{FF2B5EF4-FFF2-40B4-BE49-F238E27FC236}">
-                <a16:creationId xmlns:a16="http://schemas.microsoft.com/office/drawing/2014/main" id="{8CC2B234-6843-14EB-00DE-8323704FBFD8}"/>
+                <a16:creationId xmlns:a16="http://schemas.microsoft.com/office/drawing/2014/main" id="{C8F870FB-52A3-FA8B-ED84-E1AEA4863348}"/>
               </a:ext>
             </a:extLst>
           </p:cNvPr>
@@ -471,7 +471,7 @@
           <p:cNvPr id="4" name="日付プレースホルダー 3">
             <a:extLst>
               <a:ext uri="{FF2B5EF4-FFF2-40B4-BE49-F238E27FC236}">
-                <a16:creationId xmlns:a16="http://schemas.microsoft.com/office/drawing/2014/main" id="{83E858F7-32FF-D32D-7CF8-31EB3988929D}"/>
+                <a16:creationId xmlns:a16="http://schemas.microsoft.com/office/drawing/2014/main" id="{9051E2FD-AF3D-D136-8385-AAF6A261AC8E}"/>
               </a:ext>
             </a:extLst>
           </p:cNvPr>
@@ -487,7 +487,7 @@
           <a:bodyPr/>
           <a:lstStyle/>
           <a:p>
-            <a:fld id="{D74A895A-4D88-4530-AAF8-1E2C34CB1223}" type="datetimeFigureOut">
+            <a:fld id="{3F65969E-335A-4CC9-BC32-B371395EF5F3}" type="datetimeFigureOut">
               <a:rPr kumimoji="1" lang="ja-JP" altLang="en-US" smtClean="0"/>
               <a:t>2026/7/30</a:t>
             </a:fld>
@@ -500,7 +500,7 @@
           <p:cNvPr id="5" name="フッター プレースホルダー 4">
             <a:extLst>
               <a:ext uri="{FF2B5EF4-FFF2-40B4-BE49-F238E27FC236}">
-                <a16:creationId xmlns:a16="http://schemas.microsoft.com/office/drawing/2014/main" id="{971EC174-609A-31CD-1701-F4C3B5B99086}"/>
+                <a16:creationId xmlns:a16="http://schemas.microsoft.com/office/drawing/2014/main" id="{CF5D6002-14F5-443C-6FEC-E310FF768784}"/>
               </a:ext>
             </a:extLst>
           </p:cNvPr>
@@ -525,7 +525,7 @@
           <p:cNvPr id="6" name="スライド番号プレースホルダー 5">
             <a:extLst>
               <a:ext uri="{FF2B5EF4-FFF2-40B4-BE49-F238E27FC236}">
-                <a16:creationId xmlns:a16="http://schemas.microsoft.com/office/drawing/2014/main" id="{AA5631F3-D665-8D9C-3320-7325C663AEB1}"/>
+                <a16:creationId xmlns:a16="http://schemas.microsoft.com/office/drawing/2014/main" id="{68C0C7E7-6D01-B9F9-3C6E-0880F80A6506}"/>
               </a:ext>
             </a:extLst>
           </p:cNvPr>
@@ -541,7 +541,7 @@
           <a:bodyPr/>
           <a:lstStyle/>
           <a:p>
-            <a:fld id="{520367FA-7816-4E51-A6DB-2AD2D8CD9123}" type="slidenum">
+            <a:fld id="{785F6CDA-CF1A-4248-ABB5-45C1D389B7E6}" type="slidenum">
               <a:rPr kumimoji="1" lang="ja-JP" altLang="en-US" smtClean="0"/>
               <a:t>‹#›</a:t>
             </a:fld>
@@ -552,7 +552,7 @@
     </p:spTree>
     <p:extLst>
       <p:ext uri="{BB962C8B-B14F-4D97-AF65-F5344CB8AC3E}">
-        <p14:creationId xmlns:p14="http://schemas.microsoft.com/office/powerpoint/2010/main" val="408946806"/>
+        <p14:creationId xmlns:p14="http://schemas.microsoft.com/office/powerpoint/2010/main" val="1117969921"/>
       </p:ext>
     </p:extLst>
   </p:cSld>
@@ -584,7 +584,7 @@
           <p:cNvPr id="2" name="縦書きタイトル 1">
             <a:extLst>
               <a:ext uri="{FF2B5EF4-FFF2-40B4-BE49-F238E27FC236}">
-                <a16:creationId xmlns:a16="http://schemas.microsoft.com/office/drawing/2014/main" id="{9856CE70-FCE9-2667-4CC2-F648188AF86B}"/>
+                <a16:creationId xmlns:a16="http://schemas.microsoft.com/office/drawing/2014/main" id="{F91628AB-D5CE-996E-DDF5-F5768DA289E1}"/>
               </a:ext>
             </a:extLst>
           </p:cNvPr>
@@ -617,7 +617,7 @@
           <p:cNvPr id="3" name="縦書きテキスト プレースホルダー 2">
             <a:extLst>
               <a:ext uri="{FF2B5EF4-FFF2-40B4-BE49-F238E27FC236}">
-                <a16:creationId xmlns:a16="http://schemas.microsoft.com/office/drawing/2014/main" id="{1976502B-067E-F948-971A-BC42D23C4DD9}"/>
+                <a16:creationId xmlns:a16="http://schemas.microsoft.com/office/drawing/2014/main" id="{E6C9F3E6-852E-C740-0FCE-A9DDED9C9B93}"/>
               </a:ext>
             </a:extLst>
           </p:cNvPr>
@@ -711,7 +711,7 @@
           <p:cNvPr id="4" name="日付プレースホルダー 3">
             <a:extLst>
               <a:ext uri="{FF2B5EF4-FFF2-40B4-BE49-F238E27FC236}">
-                <a16:creationId xmlns:a16="http://schemas.microsoft.com/office/drawing/2014/main" id="{71705C63-07A5-BE25-E70A-6A6F7E2A0046}"/>
+                <a16:creationId xmlns:a16="http://schemas.microsoft.com/office/drawing/2014/main" id="{6B8D932D-9629-435A-C8D3-C75F33D8537C}"/>
               </a:ext>
             </a:extLst>
           </p:cNvPr>
@@ -727,7 +727,7 @@
           <a:bodyPr/>
           <a:lstStyle/>
           <a:p>
-            <a:fld id="{D74A895A-4D88-4530-AAF8-1E2C34CB1223}" type="datetimeFigureOut">
+            <a:fld id="{3F65969E-335A-4CC9-BC32-B371395EF5F3}" type="datetimeFigureOut">
               <a:rPr kumimoji="1" lang="ja-JP" altLang="en-US" smtClean="0"/>
               <a:t>2026/7/30</a:t>
             </a:fld>
@@ -740,7 +740,7 @@
           <p:cNvPr id="5" name="フッター プレースホルダー 4">
             <a:extLst>
               <a:ext uri="{FF2B5EF4-FFF2-40B4-BE49-F238E27FC236}">
-                <a16:creationId xmlns:a16="http://schemas.microsoft.com/office/drawing/2014/main" id="{5F68ACA1-066A-C365-8517-B259C961184A}"/>
+                <a16:creationId xmlns:a16="http://schemas.microsoft.com/office/drawing/2014/main" id="{FEAFAB59-E144-F3F0-F3FF-B4FB8ABE6127}"/>
               </a:ext>
             </a:extLst>
           </p:cNvPr>
@@ -765,7 +765,7 @@
           <p:cNvPr id="6" name="スライド番号プレースホルダー 5">
             <a:extLst>
               <a:ext uri="{FF2B5EF4-FFF2-40B4-BE49-F238E27FC236}">
-                <a16:creationId xmlns:a16="http://schemas.microsoft.com/office/drawing/2014/main" id="{92A81734-D64D-BA73-E69E-9100E9AA7E1C}"/>
+                <a16:creationId xmlns:a16="http://schemas.microsoft.com/office/drawing/2014/main" id="{D929227B-987D-BE85-9F1B-E9BF9B962E60}"/>
               </a:ext>
             </a:extLst>
           </p:cNvPr>
@@ -781,7 +781,7 @@
           <a:bodyPr/>
           <a:lstStyle/>
           <a:p>
-            <a:fld id="{520367FA-7816-4E51-A6DB-2AD2D8CD9123}" type="slidenum">
+            <a:fld id="{785F6CDA-CF1A-4248-ABB5-45C1D389B7E6}" type="slidenum">
               <a:rPr kumimoji="1" lang="ja-JP" altLang="en-US" smtClean="0"/>
               <a:t>‹#›</a:t>
             </a:fld>
@@ -792,7 +792,7 @@
     </p:spTree>
     <p:extLst>
       <p:ext uri="{BB962C8B-B14F-4D97-AF65-F5344CB8AC3E}">
-        <p14:creationId xmlns:p14="http://schemas.microsoft.com/office/powerpoint/2010/main" val="4240145714"/>
+        <p14:creationId xmlns:p14="http://schemas.microsoft.com/office/powerpoint/2010/main" val="3861045004"/>
       </p:ext>
     </p:extLst>
   </p:cSld>
@@ -824,7 +824,7 @@
           <p:cNvPr id="2" name="タイトル 1">
             <a:extLst>
               <a:ext uri="{FF2B5EF4-FFF2-40B4-BE49-F238E27FC236}">
-                <a16:creationId xmlns:a16="http://schemas.microsoft.com/office/drawing/2014/main" id="{3DBFCAAC-62F7-0F1A-D77C-1FCA82336947}"/>
+                <a16:creationId xmlns:a16="http://schemas.microsoft.com/office/drawing/2014/main" id="{EE17928A-4E17-A076-69DA-76A2D4D643D8}"/>
               </a:ext>
             </a:extLst>
           </p:cNvPr>
@@ -852,7 +852,7 @@
           <p:cNvPr id="3" name="コンテンツ プレースホルダー 2">
             <a:extLst>
               <a:ext uri="{FF2B5EF4-FFF2-40B4-BE49-F238E27FC236}">
-                <a16:creationId xmlns:a16="http://schemas.microsoft.com/office/drawing/2014/main" id="{9ED734F9-2FF1-6ABE-09C4-A08637000212}"/>
+                <a16:creationId xmlns:a16="http://schemas.microsoft.com/office/drawing/2014/main" id="{8AA4ABDD-BB8E-6FAF-8EEC-D5E26DF5665E}"/>
               </a:ext>
             </a:extLst>
           </p:cNvPr>
@@ -941,7 +941,7 @@
           <p:cNvPr id="4" name="日付プレースホルダー 3">
             <a:extLst>
               <a:ext uri="{FF2B5EF4-FFF2-40B4-BE49-F238E27FC236}">
-                <a16:creationId xmlns:a16="http://schemas.microsoft.com/office/drawing/2014/main" id="{49D572CF-3F50-FC11-C65B-9B3130DC17D9}"/>
+                <a16:creationId xmlns:a16="http://schemas.microsoft.com/office/drawing/2014/main" id="{FD7F69A2-3EDF-19A1-4D64-724A856EFC96}"/>
               </a:ext>
             </a:extLst>
           </p:cNvPr>
@@ -957,7 +957,7 @@
           <a:bodyPr/>
           <a:lstStyle/>
           <a:p>
-            <a:fld id="{D74A895A-4D88-4530-AAF8-1E2C34CB1223}" type="datetimeFigureOut">
+            <a:fld id="{3F65969E-335A-4CC9-BC32-B371395EF5F3}" type="datetimeFigureOut">
               <a:rPr kumimoji="1" lang="ja-JP" altLang="en-US" smtClean="0"/>
               <a:t>2026/7/30</a:t>
             </a:fld>
@@ -970,7 +970,7 @@
           <p:cNvPr id="5" name="フッター プレースホルダー 4">
             <a:extLst>
               <a:ext uri="{FF2B5EF4-FFF2-40B4-BE49-F238E27FC236}">
-                <a16:creationId xmlns:a16="http://schemas.microsoft.com/office/drawing/2014/main" id="{BC3A410F-7952-5BDC-2A0D-CD322F246322}"/>
+                <a16:creationId xmlns:a16="http://schemas.microsoft.com/office/drawing/2014/main" id="{E18550CA-8EFD-843A-6850-9C0B5BF513EB}"/>
               </a:ext>
             </a:extLst>
           </p:cNvPr>
@@ -995,7 +995,7 @@
           <p:cNvPr id="6" name="スライド番号プレースホルダー 5">
             <a:extLst>
               <a:ext uri="{FF2B5EF4-FFF2-40B4-BE49-F238E27FC236}">
-                <a16:creationId xmlns:a16="http://schemas.microsoft.com/office/drawing/2014/main" id="{59F7345A-7185-9B50-8604-194B3E269254}"/>
+                <a16:creationId xmlns:a16="http://schemas.microsoft.com/office/drawing/2014/main" id="{76CFD154-33EF-1F9D-A246-DB940760C939}"/>
               </a:ext>
             </a:extLst>
           </p:cNvPr>
@@ -1011,7 +1011,7 @@
           <a:bodyPr/>
           <a:lstStyle/>
           <a:p>
-            <a:fld id="{520367FA-7816-4E51-A6DB-2AD2D8CD9123}" type="slidenum">
+            <a:fld id="{785F6CDA-CF1A-4248-ABB5-45C1D389B7E6}" type="slidenum">
               <a:rPr kumimoji="1" lang="ja-JP" altLang="en-US" smtClean="0"/>
               <a:t>‹#›</a:t>
             </a:fld>
@@ -1022,7 +1022,7 @@
     </p:spTree>
     <p:extLst>
       <p:ext uri="{BB962C8B-B14F-4D97-AF65-F5344CB8AC3E}">
-        <p14:creationId xmlns:p14="http://schemas.microsoft.com/office/powerpoint/2010/main" val="3736281635"/>
+        <p14:creationId xmlns:p14="http://schemas.microsoft.com/office/powerpoint/2010/main" val="3680333869"/>
       </p:ext>
     </p:extLst>
   </p:cSld>
@@ -1054,7 +1054,7 @@
           <p:cNvPr id="2" name="タイトル 1">
             <a:extLst>
               <a:ext uri="{FF2B5EF4-FFF2-40B4-BE49-F238E27FC236}">
-                <a16:creationId xmlns:a16="http://schemas.microsoft.com/office/drawing/2014/main" id="{7314B12D-CD6D-523D-400A-1E48D35F421C}"/>
+                <a16:creationId xmlns:a16="http://schemas.microsoft.com/office/drawing/2014/main" id="{28B3AE76-FE8A-59B9-D782-1D91EFB27302}"/>
               </a:ext>
             </a:extLst>
           </p:cNvPr>
@@ -1091,7 +1091,7 @@
           <p:cNvPr id="3" name="テキスト プレースホルダー 2">
             <a:extLst>
               <a:ext uri="{FF2B5EF4-FFF2-40B4-BE49-F238E27FC236}">
-                <a16:creationId xmlns:a16="http://schemas.microsoft.com/office/drawing/2014/main" id="{1FDD14E8-194B-4CBC-60C8-1FA544E76C2C}"/>
+                <a16:creationId xmlns:a16="http://schemas.microsoft.com/office/drawing/2014/main" id="{7668B780-DB97-46EF-8C23-222EF8076FEB}"/>
               </a:ext>
             </a:extLst>
           </p:cNvPr>
@@ -1216,7 +1216,7 @@
           <p:cNvPr id="4" name="日付プレースホルダー 3">
             <a:extLst>
               <a:ext uri="{FF2B5EF4-FFF2-40B4-BE49-F238E27FC236}">
-                <a16:creationId xmlns:a16="http://schemas.microsoft.com/office/drawing/2014/main" id="{63DDCCFE-3CD2-9820-0547-B57FACC8F430}"/>
+                <a16:creationId xmlns:a16="http://schemas.microsoft.com/office/drawing/2014/main" id="{69286EE8-F3B9-9A2A-2499-08B84C1919B1}"/>
               </a:ext>
             </a:extLst>
           </p:cNvPr>
@@ -1232,7 +1232,7 @@
           <a:bodyPr/>
           <a:lstStyle/>
           <a:p>
-            <a:fld id="{D74A895A-4D88-4530-AAF8-1E2C34CB1223}" type="datetimeFigureOut">
+            <a:fld id="{3F65969E-335A-4CC9-BC32-B371395EF5F3}" type="datetimeFigureOut">
               <a:rPr kumimoji="1" lang="ja-JP" altLang="en-US" smtClean="0"/>
               <a:t>2026/7/30</a:t>
             </a:fld>
@@ -1245,7 +1245,7 @@
           <p:cNvPr id="5" name="フッター プレースホルダー 4">
             <a:extLst>
               <a:ext uri="{FF2B5EF4-FFF2-40B4-BE49-F238E27FC236}">
-                <a16:creationId xmlns:a16="http://schemas.microsoft.com/office/drawing/2014/main" id="{5686EB91-27B9-AC95-57C2-D9EC347718DD}"/>
+                <a16:creationId xmlns:a16="http://schemas.microsoft.com/office/drawing/2014/main" id="{13EE1AA1-D35B-C9B4-DBAF-0B561D99D430}"/>
               </a:ext>
             </a:extLst>
           </p:cNvPr>
@@ -1270,7 +1270,7 @@
           <p:cNvPr id="6" name="スライド番号プレースホルダー 5">
             <a:extLst>
               <a:ext uri="{FF2B5EF4-FFF2-40B4-BE49-F238E27FC236}">
-                <a16:creationId xmlns:a16="http://schemas.microsoft.com/office/drawing/2014/main" id="{88ACD630-30E2-175C-D14C-13AB020AE4ED}"/>
+                <a16:creationId xmlns:a16="http://schemas.microsoft.com/office/drawing/2014/main" id="{9A99095A-BB6B-B017-4548-790C6E2F9E98}"/>
               </a:ext>
             </a:extLst>
           </p:cNvPr>
@@ -1286,7 +1286,7 @@
           <a:bodyPr/>
           <a:lstStyle/>
           <a:p>
-            <a:fld id="{520367FA-7816-4E51-A6DB-2AD2D8CD9123}" type="slidenum">
+            <a:fld id="{785F6CDA-CF1A-4248-ABB5-45C1D389B7E6}" type="slidenum">
               <a:rPr kumimoji="1" lang="ja-JP" altLang="en-US" smtClean="0"/>
               <a:t>‹#›</a:t>
             </a:fld>
@@ -1297,7 +1297,7 @@
     </p:spTree>
     <p:extLst>
       <p:ext uri="{BB962C8B-B14F-4D97-AF65-F5344CB8AC3E}">
-        <p14:creationId xmlns:p14="http://schemas.microsoft.com/office/powerpoint/2010/main" val="31762395"/>
+        <p14:creationId xmlns:p14="http://schemas.microsoft.com/office/powerpoint/2010/main" val="2815307654"/>
       </p:ext>
     </p:extLst>
   </p:cSld>
@@ -1329,7 +1329,7 @@
           <p:cNvPr id="2" name="タイトル 1">
             <a:extLst>
               <a:ext uri="{FF2B5EF4-FFF2-40B4-BE49-F238E27FC236}">
-                <a16:creationId xmlns:a16="http://schemas.microsoft.com/office/drawing/2014/main" id="{948B3639-16AB-C8DE-A55F-BECB4A81A231}"/>
+                <a16:creationId xmlns:a16="http://schemas.microsoft.com/office/drawing/2014/main" id="{A62B8D13-DED6-C812-B03C-783167CB79DC}"/>
               </a:ext>
             </a:extLst>
           </p:cNvPr>
@@ -1357,7 +1357,7 @@
           <p:cNvPr id="3" name="コンテンツ プレースホルダー 2">
             <a:extLst>
               <a:ext uri="{FF2B5EF4-FFF2-40B4-BE49-F238E27FC236}">
-                <a16:creationId xmlns:a16="http://schemas.microsoft.com/office/drawing/2014/main" id="{2FC9DCF4-DE35-B176-A400-13D2A3B68691}"/>
+                <a16:creationId xmlns:a16="http://schemas.microsoft.com/office/drawing/2014/main" id="{AD7E11AC-F234-0103-C4F1-E9CE8E652F19}"/>
               </a:ext>
             </a:extLst>
           </p:cNvPr>
@@ -1451,7 +1451,7 @@
           <p:cNvPr id="4" name="コンテンツ プレースホルダー 3">
             <a:extLst>
               <a:ext uri="{FF2B5EF4-FFF2-40B4-BE49-F238E27FC236}">
-                <a16:creationId xmlns:a16="http://schemas.microsoft.com/office/drawing/2014/main" id="{B4F2AEE1-27DF-C5A7-F744-2D24493AF381}"/>
+                <a16:creationId xmlns:a16="http://schemas.microsoft.com/office/drawing/2014/main" id="{673003D2-A80F-21EA-72E7-DBDEC65D4942}"/>
               </a:ext>
             </a:extLst>
           </p:cNvPr>
@@ -1545,7 +1545,7 @@
           <p:cNvPr id="5" name="日付プレースホルダー 4">
             <a:extLst>
               <a:ext uri="{FF2B5EF4-FFF2-40B4-BE49-F238E27FC236}">
-                <a16:creationId xmlns:a16="http://schemas.microsoft.com/office/drawing/2014/main" id="{0AFB4EB8-AB97-4DCC-8846-6E151A1FFF4C}"/>
+                <a16:creationId xmlns:a16="http://schemas.microsoft.com/office/drawing/2014/main" id="{3C09E32A-CA70-D409-5B49-C7ED4D9988EA}"/>
               </a:ext>
             </a:extLst>
           </p:cNvPr>
@@ -1561,7 +1561,7 @@
           <a:bodyPr/>
           <a:lstStyle/>
           <a:p>
-            <a:fld id="{D74A895A-4D88-4530-AAF8-1E2C34CB1223}" type="datetimeFigureOut">
+            <a:fld id="{3F65969E-335A-4CC9-BC32-B371395EF5F3}" type="datetimeFigureOut">
               <a:rPr kumimoji="1" lang="ja-JP" altLang="en-US" smtClean="0"/>
               <a:t>2026/7/30</a:t>
             </a:fld>
@@ -1574,7 +1574,7 @@
           <p:cNvPr id="6" name="フッター プレースホルダー 5">
             <a:extLst>
               <a:ext uri="{FF2B5EF4-FFF2-40B4-BE49-F238E27FC236}">
-                <a16:creationId xmlns:a16="http://schemas.microsoft.com/office/drawing/2014/main" id="{4F70F560-87CD-B382-F761-5EB68A52DAEC}"/>
+                <a16:creationId xmlns:a16="http://schemas.microsoft.com/office/drawing/2014/main" id="{A47260E6-6AB2-B206-7FAF-DF2999F5FFBA}"/>
               </a:ext>
             </a:extLst>
           </p:cNvPr>
@@ -1599,7 +1599,7 @@
           <p:cNvPr id="7" name="スライド番号プレースホルダー 6">
             <a:extLst>
               <a:ext uri="{FF2B5EF4-FFF2-40B4-BE49-F238E27FC236}">
-                <a16:creationId xmlns:a16="http://schemas.microsoft.com/office/drawing/2014/main" id="{5E09B65A-CBAA-05B5-C6E3-4C02296A38EE}"/>
+                <a16:creationId xmlns:a16="http://schemas.microsoft.com/office/drawing/2014/main" id="{F29EE656-9D4A-13A9-55FA-1447AD2B919F}"/>
               </a:ext>
             </a:extLst>
           </p:cNvPr>
@@ -1615,7 +1615,7 @@
           <a:bodyPr/>
           <a:lstStyle/>
           <a:p>
-            <a:fld id="{520367FA-7816-4E51-A6DB-2AD2D8CD9123}" type="slidenum">
+            <a:fld id="{785F6CDA-CF1A-4248-ABB5-45C1D389B7E6}" type="slidenum">
               <a:rPr kumimoji="1" lang="ja-JP" altLang="en-US" smtClean="0"/>
               <a:t>‹#›</a:t>
             </a:fld>
@@ -1626,7 +1626,7 @@
     </p:spTree>
     <p:extLst>
       <p:ext uri="{BB962C8B-B14F-4D97-AF65-F5344CB8AC3E}">
-        <p14:creationId xmlns:p14="http://schemas.microsoft.com/office/powerpoint/2010/main" val="2045473432"/>
+        <p14:creationId xmlns:p14="http://schemas.microsoft.com/office/powerpoint/2010/main" val="3000573975"/>
       </p:ext>
     </p:extLst>
   </p:cSld>
@@ -1658,7 +1658,7 @@
           <p:cNvPr id="2" name="タイトル 1">
             <a:extLst>
               <a:ext uri="{FF2B5EF4-FFF2-40B4-BE49-F238E27FC236}">
-                <a16:creationId xmlns:a16="http://schemas.microsoft.com/office/drawing/2014/main" id="{462DEC3F-49A1-9291-B813-C5B90C501F64}"/>
+                <a16:creationId xmlns:a16="http://schemas.microsoft.com/office/drawing/2014/main" id="{AC62039E-FAE1-B50E-1CEB-0358C5C9245B}"/>
               </a:ext>
             </a:extLst>
           </p:cNvPr>
@@ -1691,7 +1691,7 @@
           <p:cNvPr id="3" name="テキスト プレースホルダー 2">
             <a:extLst>
               <a:ext uri="{FF2B5EF4-FFF2-40B4-BE49-F238E27FC236}">
-                <a16:creationId xmlns:a16="http://schemas.microsoft.com/office/drawing/2014/main" id="{CF3EEEE1-7E8B-170B-215B-1CA0B46EBF65}"/>
+                <a16:creationId xmlns:a16="http://schemas.microsoft.com/office/drawing/2014/main" id="{C7E25D50-FDD1-B91B-E9E0-E9EAED14A264}"/>
               </a:ext>
             </a:extLst>
           </p:cNvPr>
@@ -1762,7 +1762,7 @@
           <p:cNvPr id="4" name="コンテンツ プレースホルダー 3">
             <a:extLst>
               <a:ext uri="{FF2B5EF4-FFF2-40B4-BE49-F238E27FC236}">
-                <a16:creationId xmlns:a16="http://schemas.microsoft.com/office/drawing/2014/main" id="{5477C676-75CF-3647-42B2-7DD9395D9C68}"/>
+                <a16:creationId xmlns:a16="http://schemas.microsoft.com/office/drawing/2014/main" id="{3E6CD862-E632-FFE6-D839-076EB79C9778}"/>
               </a:ext>
             </a:extLst>
           </p:cNvPr>
@@ -1856,7 +1856,7 @@
           <p:cNvPr id="5" name="テキスト プレースホルダー 4">
             <a:extLst>
               <a:ext uri="{FF2B5EF4-FFF2-40B4-BE49-F238E27FC236}">
-                <a16:creationId xmlns:a16="http://schemas.microsoft.com/office/drawing/2014/main" id="{0078C1B7-E101-D472-3911-30B8A54C5120}"/>
+                <a16:creationId xmlns:a16="http://schemas.microsoft.com/office/drawing/2014/main" id="{0CAB8D3B-9927-2F95-C6DE-771A427E8336}"/>
               </a:ext>
             </a:extLst>
           </p:cNvPr>
@@ -1927,7 +1927,7 @@
           <p:cNvPr id="6" name="コンテンツ プレースホルダー 5">
             <a:extLst>
               <a:ext uri="{FF2B5EF4-FFF2-40B4-BE49-F238E27FC236}">
-                <a16:creationId xmlns:a16="http://schemas.microsoft.com/office/drawing/2014/main" id="{4E6CCD0C-DCC3-FE22-41DB-8CB04E28A9CE}"/>
+                <a16:creationId xmlns:a16="http://schemas.microsoft.com/office/drawing/2014/main" id="{1C456194-6532-72A2-2795-A2EC0E8A17B0}"/>
               </a:ext>
             </a:extLst>
           </p:cNvPr>
@@ -2021,7 +2021,7 @@
           <p:cNvPr id="7" name="日付プレースホルダー 6">
             <a:extLst>
               <a:ext uri="{FF2B5EF4-FFF2-40B4-BE49-F238E27FC236}">
-                <a16:creationId xmlns:a16="http://schemas.microsoft.com/office/drawing/2014/main" id="{DC22AE6B-A4FF-47E4-8908-3B5B6416F262}"/>
+                <a16:creationId xmlns:a16="http://schemas.microsoft.com/office/drawing/2014/main" id="{087D936A-D26E-0FD1-E4EA-4265996D8535}"/>
               </a:ext>
             </a:extLst>
           </p:cNvPr>
@@ -2037,7 +2037,7 @@
           <a:bodyPr/>
           <a:lstStyle/>
           <a:p>
-            <a:fld id="{D74A895A-4D88-4530-AAF8-1E2C34CB1223}" type="datetimeFigureOut">
+            <a:fld id="{3F65969E-335A-4CC9-BC32-B371395EF5F3}" type="datetimeFigureOut">
               <a:rPr kumimoji="1" lang="ja-JP" altLang="en-US" smtClean="0"/>
               <a:t>2026/7/30</a:t>
             </a:fld>
@@ -2050,7 +2050,7 @@
           <p:cNvPr id="8" name="フッター プレースホルダー 7">
             <a:extLst>
               <a:ext uri="{FF2B5EF4-FFF2-40B4-BE49-F238E27FC236}">
-                <a16:creationId xmlns:a16="http://schemas.microsoft.com/office/drawing/2014/main" id="{E3108BB2-C1CC-4E09-FC90-157BBD65C600}"/>
+                <a16:creationId xmlns:a16="http://schemas.microsoft.com/office/drawing/2014/main" id="{061240C4-BC2C-4F9E-C66B-B53698983D88}"/>
               </a:ext>
             </a:extLst>
           </p:cNvPr>
@@ -2075,7 +2075,7 @@
           <p:cNvPr id="9" name="スライド番号プレースホルダー 8">
             <a:extLst>
               <a:ext uri="{FF2B5EF4-FFF2-40B4-BE49-F238E27FC236}">
-                <a16:creationId xmlns:a16="http://schemas.microsoft.com/office/drawing/2014/main" id="{604850AA-3BA8-A2D0-4AF8-CA31CF0B54F5}"/>
+                <a16:creationId xmlns:a16="http://schemas.microsoft.com/office/drawing/2014/main" id="{697968CC-4233-DD5E-8371-96AE2363C415}"/>
               </a:ext>
             </a:extLst>
           </p:cNvPr>
@@ -2091,7 +2091,7 @@
           <a:bodyPr/>
           <a:lstStyle/>
           <a:p>
-            <a:fld id="{520367FA-7816-4E51-A6DB-2AD2D8CD9123}" type="slidenum">
+            <a:fld id="{785F6CDA-CF1A-4248-ABB5-45C1D389B7E6}" type="slidenum">
               <a:rPr kumimoji="1" lang="ja-JP" altLang="en-US" smtClean="0"/>
               <a:t>‹#›</a:t>
             </a:fld>
@@ -2102,7 +2102,7 @@
     </p:spTree>
     <p:extLst>
       <p:ext uri="{BB962C8B-B14F-4D97-AF65-F5344CB8AC3E}">
-        <p14:creationId xmlns:p14="http://schemas.microsoft.com/office/powerpoint/2010/main" val="1131585663"/>
+        <p14:creationId xmlns:p14="http://schemas.microsoft.com/office/powerpoint/2010/main" val="1162773858"/>
       </p:ext>
     </p:extLst>
   </p:cSld>
@@ -2134,7 +2134,7 @@
           <p:cNvPr id="2" name="タイトル 1">
             <a:extLst>
               <a:ext uri="{FF2B5EF4-FFF2-40B4-BE49-F238E27FC236}">
-                <a16:creationId xmlns:a16="http://schemas.microsoft.com/office/drawing/2014/main" id="{025EEA97-FE54-6DA0-68FD-66D38F7E4419}"/>
+                <a16:creationId xmlns:a16="http://schemas.microsoft.com/office/drawing/2014/main" id="{5929E524-8584-BE1E-D861-F78BE963B788}"/>
               </a:ext>
             </a:extLst>
           </p:cNvPr>
@@ -2162,7 +2162,7 @@
           <p:cNvPr id="3" name="日付プレースホルダー 2">
             <a:extLst>
               <a:ext uri="{FF2B5EF4-FFF2-40B4-BE49-F238E27FC236}">
-                <a16:creationId xmlns:a16="http://schemas.microsoft.com/office/drawing/2014/main" id="{3E363162-E3DF-F149-E0DA-7E7AFCC182A6}"/>
+                <a16:creationId xmlns:a16="http://schemas.microsoft.com/office/drawing/2014/main" id="{4DC4EA8B-4153-2C2E-5A18-10822155CD93}"/>
               </a:ext>
             </a:extLst>
           </p:cNvPr>
@@ -2178,7 +2178,7 @@
           <a:bodyPr/>
           <a:lstStyle/>
           <a:p>
-            <a:fld id="{D74A895A-4D88-4530-AAF8-1E2C34CB1223}" type="datetimeFigureOut">
+            <a:fld id="{3F65969E-335A-4CC9-BC32-B371395EF5F3}" type="datetimeFigureOut">
               <a:rPr kumimoji="1" lang="ja-JP" altLang="en-US" smtClean="0"/>
               <a:t>2026/7/30</a:t>
             </a:fld>
@@ -2191,7 +2191,7 @@
           <p:cNvPr id="4" name="フッター プレースホルダー 3">
             <a:extLst>
               <a:ext uri="{FF2B5EF4-FFF2-40B4-BE49-F238E27FC236}">
-                <a16:creationId xmlns:a16="http://schemas.microsoft.com/office/drawing/2014/main" id="{B4FBDE3E-2FE2-AC9F-290D-AD4DEA2E1A14}"/>
+                <a16:creationId xmlns:a16="http://schemas.microsoft.com/office/drawing/2014/main" id="{78217ACD-E5E4-57E8-FD78-D127E911A6B2}"/>
               </a:ext>
             </a:extLst>
           </p:cNvPr>
@@ -2216,7 +2216,7 @@
           <p:cNvPr id="5" name="スライド番号プレースホルダー 4">
             <a:extLst>
               <a:ext uri="{FF2B5EF4-FFF2-40B4-BE49-F238E27FC236}">
-                <a16:creationId xmlns:a16="http://schemas.microsoft.com/office/drawing/2014/main" id="{4E900BB5-0A86-462E-F488-22E5AEB2AE6A}"/>
+                <a16:creationId xmlns:a16="http://schemas.microsoft.com/office/drawing/2014/main" id="{06BDB01B-ED47-E9AD-E711-D16F8FF9E58E}"/>
               </a:ext>
             </a:extLst>
           </p:cNvPr>
@@ -2232,7 +2232,7 @@
           <a:bodyPr/>
           <a:lstStyle/>
           <a:p>
-            <a:fld id="{520367FA-7816-4E51-A6DB-2AD2D8CD9123}" type="slidenum">
+            <a:fld id="{785F6CDA-CF1A-4248-ABB5-45C1D389B7E6}" type="slidenum">
               <a:rPr kumimoji="1" lang="ja-JP" altLang="en-US" smtClean="0"/>
               <a:t>‹#›</a:t>
             </a:fld>
@@ -2243,7 +2243,7 @@
     </p:spTree>
     <p:extLst>
       <p:ext uri="{BB962C8B-B14F-4D97-AF65-F5344CB8AC3E}">
-        <p14:creationId xmlns:p14="http://schemas.microsoft.com/office/powerpoint/2010/main" val="3126320548"/>
+        <p14:creationId xmlns:p14="http://schemas.microsoft.com/office/powerpoint/2010/main" val="147403806"/>
       </p:ext>
     </p:extLst>
   </p:cSld>
@@ -2275,7 +2275,7 @@
           <p:cNvPr id="2" name="日付プレースホルダー 1">
             <a:extLst>
               <a:ext uri="{FF2B5EF4-FFF2-40B4-BE49-F238E27FC236}">
-                <a16:creationId xmlns:a16="http://schemas.microsoft.com/office/drawing/2014/main" id="{46B0EE36-582E-5CA2-F13A-FDE92AA3D041}"/>
+                <a16:creationId xmlns:a16="http://schemas.microsoft.com/office/drawing/2014/main" id="{B4E91C3D-134B-68E2-F96D-9994C0069D15}"/>
               </a:ext>
             </a:extLst>
           </p:cNvPr>
@@ -2291,7 +2291,7 @@
           <a:bodyPr/>
           <a:lstStyle/>
           <a:p>
-            <a:fld id="{D74A895A-4D88-4530-AAF8-1E2C34CB1223}" type="datetimeFigureOut">
+            <a:fld id="{3F65969E-335A-4CC9-BC32-B371395EF5F3}" type="datetimeFigureOut">
               <a:rPr kumimoji="1" lang="ja-JP" altLang="en-US" smtClean="0"/>
               <a:t>2026/7/30</a:t>
             </a:fld>
@@ -2304,7 +2304,7 @@
           <p:cNvPr id="3" name="フッター プレースホルダー 2">
             <a:extLst>
               <a:ext uri="{FF2B5EF4-FFF2-40B4-BE49-F238E27FC236}">
-                <a16:creationId xmlns:a16="http://schemas.microsoft.com/office/drawing/2014/main" id="{797B97F1-8C17-9315-4412-B1C835CAE3E5}"/>
+                <a16:creationId xmlns:a16="http://schemas.microsoft.com/office/drawing/2014/main" id="{A1FF02B8-9746-421C-3628-35AE99F269F7}"/>
               </a:ext>
             </a:extLst>
           </p:cNvPr>
@@ -2329,7 +2329,7 @@
           <p:cNvPr id="4" name="スライド番号プレースホルダー 3">
             <a:extLst>
               <a:ext uri="{FF2B5EF4-FFF2-40B4-BE49-F238E27FC236}">
-                <a16:creationId xmlns:a16="http://schemas.microsoft.com/office/drawing/2014/main" id="{FE3C9CE6-F4C7-C83A-F071-B1680A571305}"/>
+                <a16:creationId xmlns:a16="http://schemas.microsoft.com/office/drawing/2014/main" id="{ADF4917C-CC4C-D0C9-00DB-865FA209C4EE}"/>
               </a:ext>
             </a:extLst>
           </p:cNvPr>
@@ -2345,7 +2345,7 @@
           <a:bodyPr/>
           <a:lstStyle/>
           <a:p>
-            <a:fld id="{520367FA-7816-4E51-A6DB-2AD2D8CD9123}" type="slidenum">
+            <a:fld id="{785F6CDA-CF1A-4248-ABB5-45C1D389B7E6}" type="slidenum">
               <a:rPr kumimoji="1" lang="ja-JP" altLang="en-US" smtClean="0"/>
               <a:t>‹#›</a:t>
             </a:fld>
@@ -2356,7 +2356,7 @@
     </p:spTree>
     <p:extLst>
       <p:ext uri="{BB962C8B-B14F-4D97-AF65-F5344CB8AC3E}">
-        <p14:creationId xmlns:p14="http://schemas.microsoft.com/office/powerpoint/2010/main" val="3808420049"/>
+        <p14:creationId xmlns:p14="http://schemas.microsoft.com/office/powerpoint/2010/main" val="410304655"/>
       </p:ext>
     </p:extLst>
   </p:cSld>
@@ -2388,7 +2388,7 @@
           <p:cNvPr id="2" name="タイトル 1">
             <a:extLst>
               <a:ext uri="{FF2B5EF4-FFF2-40B4-BE49-F238E27FC236}">
-                <a16:creationId xmlns:a16="http://schemas.microsoft.com/office/drawing/2014/main" id="{AF017ABC-7827-8F3D-1823-DBEADBEBD7B2}"/>
+                <a16:creationId xmlns:a16="http://schemas.microsoft.com/office/drawing/2014/main" id="{F29A1F58-1729-91A1-F925-133B6B33996F}"/>
               </a:ext>
             </a:extLst>
           </p:cNvPr>
@@ -2425,7 +2425,7 @@
           <p:cNvPr id="3" name="コンテンツ プレースホルダー 2">
             <a:extLst>
               <a:ext uri="{FF2B5EF4-FFF2-40B4-BE49-F238E27FC236}">
-                <a16:creationId xmlns:a16="http://schemas.microsoft.com/office/drawing/2014/main" id="{2FA4CD87-8215-5F7C-B3B9-B50F71A12BBF}"/>
+                <a16:creationId xmlns:a16="http://schemas.microsoft.com/office/drawing/2014/main" id="{40FF1CA7-22AA-3A8F-64AE-BC58A58386F9}"/>
               </a:ext>
             </a:extLst>
           </p:cNvPr>
@@ -2547,7 +2547,7 @@
           <p:cNvPr id="4" name="テキスト プレースホルダー 3">
             <a:extLst>
               <a:ext uri="{FF2B5EF4-FFF2-40B4-BE49-F238E27FC236}">
-                <a16:creationId xmlns:a16="http://schemas.microsoft.com/office/drawing/2014/main" id="{BF54BAB6-523C-2DAC-3BD1-3D2B24050F5D}"/>
+                <a16:creationId xmlns:a16="http://schemas.microsoft.com/office/drawing/2014/main" id="{33EAF102-949C-9945-1B2C-0879792116CC}"/>
               </a:ext>
             </a:extLst>
           </p:cNvPr>
@@ -2618,7 +2618,7 @@
           <p:cNvPr id="5" name="日付プレースホルダー 4">
             <a:extLst>
               <a:ext uri="{FF2B5EF4-FFF2-40B4-BE49-F238E27FC236}">
-                <a16:creationId xmlns:a16="http://schemas.microsoft.com/office/drawing/2014/main" id="{E7900629-B5BA-FE40-2A7F-377D4B75D4E3}"/>
+                <a16:creationId xmlns:a16="http://schemas.microsoft.com/office/drawing/2014/main" id="{98960C4E-5BFF-8093-5383-54227855A355}"/>
               </a:ext>
             </a:extLst>
           </p:cNvPr>
@@ -2634,7 +2634,7 @@
           <a:bodyPr/>
           <a:lstStyle/>
           <a:p>
-            <a:fld id="{D74A895A-4D88-4530-AAF8-1E2C34CB1223}" type="datetimeFigureOut">
+            <a:fld id="{3F65969E-335A-4CC9-BC32-B371395EF5F3}" type="datetimeFigureOut">
               <a:rPr kumimoji="1" lang="ja-JP" altLang="en-US" smtClean="0"/>
               <a:t>2026/7/30</a:t>
             </a:fld>
@@ -2647,7 +2647,7 @@
           <p:cNvPr id="6" name="フッター プレースホルダー 5">
             <a:extLst>
               <a:ext uri="{FF2B5EF4-FFF2-40B4-BE49-F238E27FC236}">
-                <a16:creationId xmlns:a16="http://schemas.microsoft.com/office/drawing/2014/main" id="{1EB3E0B1-245A-6553-EEC4-0C2791BC9D55}"/>
+                <a16:creationId xmlns:a16="http://schemas.microsoft.com/office/drawing/2014/main" id="{2C966586-7A7D-D3D1-D8F9-FB4B9EE00598}"/>
               </a:ext>
             </a:extLst>
           </p:cNvPr>
@@ -2672,7 +2672,7 @@
           <p:cNvPr id="7" name="スライド番号プレースホルダー 6">
             <a:extLst>
               <a:ext uri="{FF2B5EF4-FFF2-40B4-BE49-F238E27FC236}">
-                <a16:creationId xmlns:a16="http://schemas.microsoft.com/office/drawing/2014/main" id="{E80F4BAE-5B27-A802-564E-28939009B863}"/>
+                <a16:creationId xmlns:a16="http://schemas.microsoft.com/office/drawing/2014/main" id="{C302E2CC-4CB1-B653-7D25-CDC483E20D5A}"/>
               </a:ext>
             </a:extLst>
           </p:cNvPr>
@@ -2688,7 +2688,7 @@
           <a:bodyPr/>
           <a:lstStyle/>
           <a:p>
-            <a:fld id="{520367FA-7816-4E51-A6DB-2AD2D8CD9123}" type="slidenum">
+            <a:fld id="{785F6CDA-CF1A-4248-ABB5-45C1D389B7E6}" type="slidenum">
               <a:rPr kumimoji="1" lang="ja-JP" altLang="en-US" smtClean="0"/>
               <a:t>‹#›</a:t>
             </a:fld>
@@ -2699,7 +2699,7 @@
     </p:spTree>
     <p:extLst>
       <p:ext uri="{BB962C8B-B14F-4D97-AF65-F5344CB8AC3E}">
-        <p14:creationId xmlns:p14="http://schemas.microsoft.com/office/powerpoint/2010/main" val="3479149615"/>
+        <p14:creationId xmlns:p14="http://schemas.microsoft.com/office/powerpoint/2010/main" val="3647558585"/>
       </p:ext>
     </p:extLst>
   </p:cSld>
@@ -2731,7 +2731,7 @@
           <p:cNvPr id="2" name="タイトル 1">
             <a:extLst>
               <a:ext uri="{FF2B5EF4-FFF2-40B4-BE49-F238E27FC236}">
-                <a16:creationId xmlns:a16="http://schemas.microsoft.com/office/drawing/2014/main" id="{5E73412A-4019-3BD0-C688-9D984781965E}"/>
+                <a16:creationId xmlns:a16="http://schemas.microsoft.com/office/drawing/2014/main" id="{9C727B32-FFF6-9B0F-861B-98FF65C0A341}"/>
               </a:ext>
             </a:extLst>
           </p:cNvPr>
@@ -2768,7 +2768,7 @@
           <p:cNvPr id="3" name="図プレースホルダー 2">
             <a:extLst>
               <a:ext uri="{FF2B5EF4-FFF2-40B4-BE49-F238E27FC236}">
-                <a16:creationId xmlns:a16="http://schemas.microsoft.com/office/drawing/2014/main" id="{90DB20B8-D2ED-2B3C-9B0A-7BD4C1E93495}"/>
+                <a16:creationId xmlns:a16="http://schemas.microsoft.com/office/drawing/2014/main" id="{173A98A7-8896-E602-D527-D3E9E7FD22FF}"/>
               </a:ext>
             </a:extLst>
           </p:cNvPr>
@@ -2835,7 +2835,7 @@
           <p:cNvPr id="4" name="テキスト プレースホルダー 3">
             <a:extLst>
               <a:ext uri="{FF2B5EF4-FFF2-40B4-BE49-F238E27FC236}">
-                <a16:creationId xmlns:a16="http://schemas.microsoft.com/office/drawing/2014/main" id="{AC0845FF-6F97-7323-D2BD-4F8167BF4E46}"/>
+                <a16:creationId xmlns:a16="http://schemas.microsoft.com/office/drawing/2014/main" id="{133C53CE-3FBD-B9A5-AF4F-FC8CE6BA3D32}"/>
               </a:ext>
             </a:extLst>
           </p:cNvPr>
@@ -2906,7 +2906,7 @@
           <p:cNvPr id="5" name="日付プレースホルダー 4">
             <a:extLst>
               <a:ext uri="{FF2B5EF4-FFF2-40B4-BE49-F238E27FC236}">
-                <a16:creationId xmlns:a16="http://schemas.microsoft.com/office/drawing/2014/main" id="{E708D284-1EFE-5B1A-0987-401E916F4530}"/>
+                <a16:creationId xmlns:a16="http://schemas.microsoft.com/office/drawing/2014/main" id="{C43B5C1B-9F2A-8C06-3059-EE294C1A575A}"/>
               </a:ext>
             </a:extLst>
           </p:cNvPr>
@@ -2922,7 +2922,7 @@
           <a:bodyPr/>
           <a:lstStyle/>
           <a:p>
-            <a:fld id="{D74A895A-4D88-4530-AAF8-1E2C34CB1223}" type="datetimeFigureOut">
+            <a:fld id="{3F65969E-335A-4CC9-BC32-B371395EF5F3}" type="datetimeFigureOut">
               <a:rPr kumimoji="1" lang="ja-JP" altLang="en-US" smtClean="0"/>
               <a:t>2026/7/30</a:t>
             </a:fld>
@@ -2935,7 +2935,7 @@
           <p:cNvPr id="6" name="フッター プレースホルダー 5">
             <a:extLst>
               <a:ext uri="{FF2B5EF4-FFF2-40B4-BE49-F238E27FC236}">
-                <a16:creationId xmlns:a16="http://schemas.microsoft.com/office/drawing/2014/main" id="{A2755BB3-FCA7-9DBB-6D35-ACF0F0555FC2}"/>
+                <a16:creationId xmlns:a16="http://schemas.microsoft.com/office/drawing/2014/main" id="{46C66B14-0CF2-3491-1BE4-840A7D0C3992}"/>
               </a:ext>
             </a:extLst>
           </p:cNvPr>
@@ -2960,7 +2960,7 @@
           <p:cNvPr id="7" name="スライド番号プレースホルダー 6">
             <a:extLst>
               <a:ext uri="{FF2B5EF4-FFF2-40B4-BE49-F238E27FC236}">
-                <a16:creationId xmlns:a16="http://schemas.microsoft.com/office/drawing/2014/main" id="{DCFA096C-720B-E393-21ED-72A230D5F1F4}"/>
+                <a16:creationId xmlns:a16="http://schemas.microsoft.com/office/drawing/2014/main" id="{BDC161A2-E95B-56AC-E0A5-5F05B7CBECF2}"/>
               </a:ext>
             </a:extLst>
           </p:cNvPr>
@@ -2976,7 +2976,7 @@
           <a:bodyPr/>
           <a:lstStyle/>
           <a:p>
-            <a:fld id="{520367FA-7816-4E51-A6DB-2AD2D8CD9123}" type="slidenum">
+            <a:fld id="{785F6CDA-CF1A-4248-ABB5-45C1D389B7E6}" type="slidenum">
               <a:rPr kumimoji="1" lang="ja-JP" altLang="en-US" smtClean="0"/>
               <a:t>‹#›</a:t>
             </a:fld>
@@ -2987,7 +2987,7 @@
     </p:spTree>
     <p:extLst>
       <p:ext uri="{BB962C8B-B14F-4D97-AF65-F5344CB8AC3E}">
-        <p14:creationId xmlns:p14="http://schemas.microsoft.com/office/powerpoint/2010/main" val="4028927440"/>
+        <p14:creationId xmlns:p14="http://schemas.microsoft.com/office/powerpoint/2010/main" val="1157625784"/>
       </p:ext>
     </p:extLst>
   </p:cSld>
@@ -3024,7 +3024,7 @@
           <p:cNvPr id="2" name="タイトル プレースホルダー 1">
             <a:extLst>
               <a:ext uri="{FF2B5EF4-FFF2-40B4-BE49-F238E27FC236}">
-                <a16:creationId xmlns:a16="http://schemas.microsoft.com/office/drawing/2014/main" id="{3B08D0F4-0961-00CB-09CA-C1B5B04F65F4}"/>
+                <a16:creationId xmlns:a16="http://schemas.microsoft.com/office/drawing/2014/main" id="{30614E70-813E-3192-5112-ADD6509F3000}"/>
               </a:ext>
             </a:extLst>
           </p:cNvPr>
@@ -3062,7 +3062,7 @@
           <p:cNvPr id="3" name="テキスト プレースホルダー 2">
             <a:extLst>
               <a:ext uri="{FF2B5EF4-FFF2-40B4-BE49-F238E27FC236}">
-                <a16:creationId xmlns:a16="http://schemas.microsoft.com/office/drawing/2014/main" id="{AE137F18-D274-5070-D28C-B6A19FC83351}"/>
+                <a16:creationId xmlns:a16="http://schemas.microsoft.com/office/drawing/2014/main" id="{592C0B5C-8225-B1E1-E30B-DF3B69CC6BAC}"/>
               </a:ext>
             </a:extLst>
           </p:cNvPr>
@@ -3161,7 +3161,7 @@
           <p:cNvPr id="4" name="日付プレースホルダー 3">
             <a:extLst>
               <a:ext uri="{FF2B5EF4-FFF2-40B4-BE49-F238E27FC236}">
-                <a16:creationId xmlns:a16="http://schemas.microsoft.com/office/drawing/2014/main" id="{E0B8449C-EFFF-0FDB-1883-0F279CDEE9D1}"/>
+                <a16:creationId xmlns:a16="http://schemas.microsoft.com/office/drawing/2014/main" id="{3A980584-D27E-40DD-812F-FC1242206C4E}"/>
               </a:ext>
             </a:extLst>
           </p:cNvPr>
@@ -3195,7 +3195,7 @@
             </a:lvl1pPr>
           </a:lstStyle>
           <a:p>
-            <a:fld id="{D74A895A-4D88-4530-AAF8-1E2C34CB1223}" type="datetimeFigureOut">
+            <a:fld id="{3F65969E-335A-4CC9-BC32-B371395EF5F3}" type="datetimeFigureOut">
               <a:rPr kumimoji="1" lang="ja-JP" altLang="en-US" smtClean="0"/>
               <a:t>2026/7/30</a:t>
             </a:fld>
@@ -3208,7 +3208,7 @@
           <p:cNvPr id="5" name="フッター プレースホルダー 4">
             <a:extLst>
               <a:ext uri="{FF2B5EF4-FFF2-40B4-BE49-F238E27FC236}">
-                <a16:creationId xmlns:a16="http://schemas.microsoft.com/office/drawing/2014/main" id="{46DC7F20-7FB4-8CD0-1E21-07F64F2CC502}"/>
+                <a16:creationId xmlns:a16="http://schemas.microsoft.com/office/drawing/2014/main" id="{EDCD3725-4604-FFC3-3411-87E677EF87C5}"/>
               </a:ext>
             </a:extLst>
           </p:cNvPr>
@@ -3251,7 +3251,7 @@
           <p:cNvPr id="6" name="スライド番号プレースホルダー 5">
             <a:extLst>
               <a:ext uri="{FF2B5EF4-FFF2-40B4-BE49-F238E27FC236}">
-                <a16:creationId xmlns:a16="http://schemas.microsoft.com/office/drawing/2014/main" id="{785543F4-8182-9886-63C3-445A722F8F64}"/>
+                <a16:creationId xmlns:a16="http://schemas.microsoft.com/office/drawing/2014/main" id="{4B509D83-C747-EF75-7050-862A8EFBE999}"/>
               </a:ext>
             </a:extLst>
           </p:cNvPr>
@@ -3285,7 +3285,7 @@
             </a:lvl1pPr>
           </a:lstStyle>
           <a:p>
-            <a:fld id="{520367FA-7816-4E51-A6DB-2AD2D8CD9123}" type="slidenum">
+            <a:fld id="{785F6CDA-CF1A-4248-ABB5-45C1D389B7E6}" type="slidenum">
               <a:rPr kumimoji="1" lang="ja-JP" altLang="en-US" smtClean="0"/>
               <a:t>‹#›</a:t>
             </a:fld>
@@ -3296,7 +3296,7 @@
     </p:spTree>
     <p:extLst>
       <p:ext uri="{BB962C8B-B14F-4D97-AF65-F5344CB8AC3E}">
-        <p14:creationId xmlns:p14="http://schemas.microsoft.com/office/powerpoint/2010/main" val="812681302"/>
+        <p14:creationId xmlns:p14="http://schemas.microsoft.com/office/powerpoint/2010/main" val="838170856"/>
       </p:ext>
     </p:extLst>
   </p:cSld>
@@ -3619,7 +3619,7 @@
           <p:cNvPr id="2" name="テキスト ボックス 1">
             <a:extLst>
               <a:ext uri="{FF2B5EF4-FFF2-40B4-BE49-F238E27FC236}">
-                <a16:creationId xmlns:a16="http://schemas.microsoft.com/office/drawing/2014/main" id="{78527997-89DB-E858-7E1F-95B2A4842024}"/>
+                <a16:creationId xmlns:a16="http://schemas.microsoft.com/office/drawing/2014/main" id="{53ADB397-B994-9892-569A-2705D34873B1}"/>
               </a:ext>
             </a:extLst>
           </p:cNvPr>
@@ -3665,7 +3665,7 @@
           <p:cNvPr id="3" name="テキスト ボックス 2">
             <a:extLst>
               <a:ext uri="{FF2B5EF4-FFF2-40B4-BE49-F238E27FC236}">
-                <a16:creationId xmlns:a16="http://schemas.microsoft.com/office/drawing/2014/main" id="{29F0C89B-CE81-A963-E228-4DFAC68126EF}"/>
+                <a16:creationId xmlns:a16="http://schemas.microsoft.com/office/drawing/2014/main" id="{B04751B2-90BA-EB6B-1EB7-E9937B47A3C8}"/>
               </a:ext>
             </a:extLst>
           </p:cNvPr>
@@ -3714,7 +3714,7 @@
           <p:cNvPr id="4" name="テキスト ボックス 3">
             <a:extLst>
               <a:ext uri="{FF2B5EF4-FFF2-40B4-BE49-F238E27FC236}">
-                <a16:creationId xmlns:a16="http://schemas.microsoft.com/office/drawing/2014/main" id="{B65F9C5C-6489-C065-3E00-1A51EB440895}"/>
+                <a16:creationId xmlns:a16="http://schemas.microsoft.com/office/drawing/2014/main" id="{D1D051F0-F00B-1EF2-1C99-5C38208CDC59}"/>
               </a:ext>
             </a:extLst>
           </p:cNvPr>
@@ -3754,7 +3754,7 @@
           <p:cNvPr id="5" name="テキスト ボックス 4">
             <a:extLst>
               <a:ext uri="{FF2B5EF4-FFF2-40B4-BE49-F238E27FC236}">
-                <a16:creationId xmlns:a16="http://schemas.microsoft.com/office/drawing/2014/main" id="{9F592B93-1B89-90ED-CDD5-692484E000D9}"/>
+                <a16:creationId xmlns:a16="http://schemas.microsoft.com/office/drawing/2014/main" id="{CB2DC39A-4118-1D48-9420-1DB615F4837A}"/>
               </a:ext>
             </a:extLst>
           </p:cNvPr>
@@ -3801,7 +3801,7 @@
             <a:hlinkClick r:id="" action="ppaction://media"/>
             <a:extLst>
               <a:ext uri="{FF2B5EF4-FFF2-40B4-BE49-F238E27FC236}">
-                <a16:creationId xmlns:a16="http://schemas.microsoft.com/office/drawing/2014/main" id="{F7A25EF5-B27B-E028-366C-1CFC94EA9A50}"/>
+                <a16:creationId xmlns:a16="http://schemas.microsoft.com/office/drawing/2014/main" id="{D16393FB-0668-FAFD-B1E7-FD7367AA8EAC}"/>
               </a:ext>
             </a:extLst>
           </p:cNvPr>
@@ -3836,7 +3836,7 @@
     </p:spTree>
     <p:extLst>
       <p:ext uri="{BB962C8B-B14F-4D97-AF65-F5344CB8AC3E}">
-        <p14:creationId xmlns:p14="http://schemas.microsoft.com/office/powerpoint/2010/main" val="1377497025"/>
+        <p14:creationId xmlns:p14="http://schemas.microsoft.com/office/powerpoint/2010/main" val="1739110430"/>
       </p:ext>
     </p:extLst>
   </p:cSld>
@@ -3960,7 +3960,7 @@
           <p:cNvPr id="2" name="テキスト ボックス 1">
             <a:extLst>
               <a:ext uri="{FF2B5EF4-FFF2-40B4-BE49-F238E27FC236}">
-                <a16:creationId xmlns:a16="http://schemas.microsoft.com/office/drawing/2014/main" id="{668A2033-9391-F5C9-7AEA-F89523F204BE}"/>
+                <a16:creationId xmlns:a16="http://schemas.microsoft.com/office/drawing/2014/main" id="{43BBD9D6-7250-7066-B113-491A793172EF}"/>
               </a:ext>
             </a:extLst>
           </p:cNvPr>
@@ -4006,7 +4006,7 @@
           <p:cNvPr id="3" name="テキスト ボックス 2">
             <a:extLst>
               <a:ext uri="{FF2B5EF4-FFF2-40B4-BE49-F238E27FC236}">
-                <a16:creationId xmlns:a16="http://schemas.microsoft.com/office/drawing/2014/main" id="{A85F901D-F8CD-EEBB-D253-D772738CE70D}"/>
+                <a16:creationId xmlns:a16="http://schemas.microsoft.com/office/drawing/2014/main" id="{0B548A7E-3593-3487-B221-928A9E0388CA}"/>
               </a:ext>
             </a:extLst>
           </p:cNvPr>
@@ -4046,7 +4046,7 @@
           <p:cNvPr id="4" name="テキスト ボックス 3">
             <a:extLst>
               <a:ext uri="{FF2B5EF4-FFF2-40B4-BE49-F238E27FC236}">
-                <a16:creationId xmlns:a16="http://schemas.microsoft.com/office/drawing/2014/main" id="{4D24FC58-6F02-F05F-5FA1-0F71F63DC6A3}"/>
+                <a16:creationId xmlns:a16="http://schemas.microsoft.com/office/drawing/2014/main" id="{6F5A941D-ECBA-707B-221F-1D728E57EFF1}"/>
               </a:ext>
             </a:extLst>
           </p:cNvPr>
@@ -4110,7 +4110,7 @@
           <p:cNvPr id="5" name="テキスト ボックス 4">
             <a:extLst>
               <a:ext uri="{FF2B5EF4-FFF2-40B4-BE49-F238E27FC236}">
-                <a16:creationId xmlns:a16="http://schemas.microsoft.com/office/drawing/2014/main" id="{279D7DC5-B666-9460-8374-18E3A17B9DC6}"/>
+                <a16:creationId xmlns:a16="http://schemas.microsoft.com/office/drawing/2014/main" id="{A158D83E-0459-80E0-4613-F2F7116E5E75}"/>
               </a:ext>
             </a:extLst>
           </p:cNvPr>
@@ -4157,7 +4157,7 @@
             <a:hlinkClick r:id="" action="ppaction://media"/>
             <a:extLst>
               <a:ext uri="{FF2B5EF4-FFF2-40B4-BE49-F238E27FC236}">
-                <a16:creationId xmlns:a16="http://schemas.microsoft.com/office/drawing/2014/main" id="{970360AB-9BF1-883B-3A5D-90C0B287271C}"/>
+                <a16:creationId xmlns:a16="http://schemas.microsoft.com/office/drawing/2014/main" id="{A8F40581-C284-46E7-A3A3-483F49B94B2B}"/>
               </a:ext>
             </a:extLst>
           </p:cNvPr>
@@ -4192,7 +4192,7 @@
     </p:spTree>
     <p:extLst>
       <p:ext uri="{BB962C8B-B14F-4D97-AF65-F5344CB8AC3E}">
-        <p14:creationId xmlns:p14="http://schemas.microsoft.com/office/powerpoint/2010/main" val="667122777"/>
+        <p14:creationId xmlns:p14="http://schemas.microsoft.com/office/powerpoint/2010/main" val="1363659116"/>
       </p:ext>
     </p:extLst>
   </p:cSld>
@@ -4316,7 +4316,7 @@
           <p:cNvPr id="2" name="テキスト ボックス 1">
             <a:extLst>
               <a:ext uri="{FF2B5EF4-FFF2-40B4-BE49-F238E27FC236}">
-                <a16:creationId xmlns:a16="http://schemas.microsoft.com/office/drawing/2014/main" id="{14CFC1D0-BA21-0004-AA30-F9EADA79785B}"/>
+                <a16:creationId xmlns:a16="http://schemas.microsoft.com/office/drawing/2014/main" id="{475ACF6C-6082-AD30-7BCF-DCC80A070173}"/>
               </a:ext>
             </a:extLst>
           </p:cNvPr>
@@ -4362,7 +4362,7 @@
           <p:cNvPr id="3" name="テキスト ボックス 2">
             <a:extLst>
               <a:ext uri="{FF2B5EF4-FFF2-40B4-BE49-F238E27FC236}">
-                <a16:creationId xmlns:a16="http://schemas.microsoft.com/office/drawing/2014/main" id="{88DB72C9-D479-E8E1-AAF0-EAD70E427A7F}"/>
+                <a16:creationId xmlns:a16="http://schemas.microsoft.com/office/drawing/2014/main" id="{45F6EB4B-EFCD-969B-1D53-9C6C3FD9BD17}"/>
               </a:ext>
             </a:extLst>
           </p:cNvPr>
@@ -4402,7 +4402,7 @@
           <p:cNvPr id="4" name="テキスト ボックス 3">
             <a:extLst>
               <a:ext uri="{FF2B5EF4-FFF2-40B4-BE49-F238E27FC236}">
-                <a16:creationId xmlns:a16="http://schemas.microsoft.com/office/drawing/2014/main" id="{6D6497CB-4010-04C2-9548-C591E730262A}"/>
+                <a16:creationId xmlns:a16="http://schemas.microsoft.com/office/drawing/2014/main" id="{1FAA93F8-3F51-54DC-6FAB-D5BDE2746526}"/>
               </a:ext>
             </a:extLst>
           </p:cNvPr>
@@ -4497,7 +4497,7 @@
           <p:cNvPr id="5" name="テキスト ボックス 4">
             <a:extLst>
               <a:ext uri="{FF2B5EF4-FFF2-40B4-BE49-F238E27FC236}">
-                <a16:creationId xmlns:a16="http://schemas.microsoft.com/office/drawing/2014/main" id="{50D2727F-7F6A-F6E7-C87C-FA19432BDB0F}"/>
+                <a16:creationId xmlns:a16="http://schemas.microsoft.com/office/drawing/2014/main" id="{77F23905-668C-CB78-35AE-0AFF4706A20A}"/>
               </a:ext>
             </a:extLst>
           </p:cNvPr>
@@ -4544,7 +4544,7 @@
             <a:hlinkClick r:id="" action="ppaction://media"/>
             <a:extLst>
               <a:ext uri="{FF2B5EF4-FFF2-40B4-BE49-F238E27FC236}">
-                <a16:creationId xmlns:a16="http://schemas.microsoft.com/office/drawing/2014/main" id="{0E6C63C4-91A4-9A10-3DB7-DC5B803E4B26}"/>
+                <a16:creationId xmlns:a16="http://schemas.microsoft.com/office/drawing/2014/main" id="{415D3F30-F076-016C-DB34-381A2AD19C44}"/>
               </a:ext>
             </a:extLst>
           </p:cNvPr>
@@ -4579,7 +4579,7 @@
     </p:spTree>
     <p:extLst>
       <p:ext uri="{BB962C8B-B14F-4D97-AF65-F5344CB8AC3E}">
-        <p14:creationId xmlns:p14="http://schemas.microsoft.com/office/powerpoint/2010/main" val="2981758050"/>
+        <p14:creationId xmlns:p14="http://schemas.microsoft.com/office/powerpoint/2010/main" val="1194390698"/>
       </p:ext>
     </p:extLst>
   </p:cSld>
@@ -4703,7 +4703,7 @@
           <p:cNvPr id="2" name="テキスト ボックス 1">
             <a:extLst>
               <a:ext uri="{FF2B5EF4-FFF2-40B4-BE49-F238E27FC236}">
-                <a16:creationId xmlns:a16="http://schemas.microsoft.com/office/drawing/2014/main" id="{DB374175-FF7B-E1B2-4068-19F71862B3A9}"/>
+                <a16:creationId xmlns:a16="http://schemas.microsoft.com/office/drawing/2014/main" id="{09515CA5-FFE5-3D60-6C62-70E64523DFF0}"/>
               </a:ext>
             </a:extLst>
           </p:cNvPr>
@@ -4749,7 +4749,7 @@
           <p:cNvPr id="3" name="テキスト ボックス 2">
             <a:extLst>
               <a:ext uri="{FF2B5EF4-FFF2-40B4-BE49-F238E27FC236}">
-                <a16:creationId xmlns:a16="http://schemas.microsoft.com/office/drawing/2014/main" id="{360012E2-AC5C-401B-6FBE-31E6DF96ACF0}"/>
+                <a16:creationId xmlns:a16="http://schemas.microsoft.com/office/drawing/2014/main" id="{47B9069E-28CD-84F2-BD51-E73C6088E2A7}"/>
               </a:ext>
             </a:extLst>
           </p:cNvPr>
@@ -4789,7 +4789,7 @@
           <p:cNvPr id="4" name="テキスト ボックス 3">
             <a:extLst>
               <a:ext uri="{FF2B5EF4-FFF2-40B4-BE49-F238E27FC236}">
-                <a16:creationId xmlns:a16="http://schemas.microsoft.com/office/drawing/2014/main" id="{A60FFC81-9D53-26ED-79F0-CFBDE0CFD39C}"/>
+                <a16:creationId xmlns:a16="http://schemas.microsoft.com/office/drawing/2014/main" id="{7BBD40BF-3CBD-27BA-41E4-D34B327FF3C4}"/>
               </a:ext>
             </a:extLst>
           </p:cNvPr>
@@ -4899,7 +4899,7 @@
           <p:cNvPr id="5" name="テキスト ボックス 4">
             <a:extLst>
               <a:ext uri="{FF2B5EF4-FFF2-40B4-BE49-F238E27FC236}">
-                <a16:creationId xmlns:a16="http://schemas.microsoft.com/office/drawing/2014/main" id="{40E88417-A784-6C56-B549-BCFD0A5F95C1}"/>
+                <a16:creationId xmlns:a16="http://schemas.microsoft.com/office/drawing/2014/main" id="{D0C73F3D-23A0-9C08-35C1-3EC3F955D02F}"/>
               </a:ext>
             </a:extLst>
           </p:cNvPr>
@@ -4946,7 +4946,7 @@
             <a:hlinkClick r:id="" action="ppaction://media"/>
             <a:extLst>
               <a:ext uri="{FF2B5EF4-FFF2-40B4-BE49-F238E27FC236}">
-                <a16:creationId xmlns:a16="http://schemas.microsoft.com/office/drawing/2014/main" id="{D4D4BB09-5036-C853-861A-013304916DB0}"/>
+                <a16:creationId xmlns:a16="http://schemas.microsoft.com/office/drawing/2014/main" id="{C422E42C-33C2-5CFC-087B-F7839B4668F3}"/>
               </a:ext>
             </a:extLst>
           </p:cNvPr>
@@ -4981,7 +4981,7 @@
     </p:spTree>
     <p:extLst>
       <p:ext uri="{BB962C8B-B14F-4D97-AF65-F5344CB8AC3E}">
-        <p14:creationId xmlns:p14="http://schemas.microsoft.com/office/powerpoint/2010/main" val="3527569239"/>
+        <p14:creationId xmlns:p14="http://schemas.microsoft.com/office/powerpoint/2010/main" val="3261736252"/>
       </p:ext>
     </p:extLst>
   </p:cSld>
@@ -5105,7 +5105,7 @@
           <p:cNvPr id="2" name="テキスト ボックス 1">
             <a:extLst>
               <a:ext uri="{FF2B5EF4-FFF2-40B4-BE49-F238E27FC236}">
-                <a16:creationId xmlns:a16="http://schemas.microsoft.com/office/drawing/2014/main" id="{8BF80581-CB91-28B2-422D-FE06EF01E454}"/>
+                <a16:creationId xmlns:a16="http://schemas.microsoft.com/office/drawing/2014/main" id="{FD7F9BCF-6F8C-B47B-D24D-7AFD1D075899}"/>
               </a:ext>
             </a:extLst>
           </p:cNvPr>
@@ -5151,7 +5151,7 @@
           <p:cNvPr id="3" name="テキスト ボックス 2">
             <a:extLst>
               <a:ext uri="{FF2B5EF4-FFF2-40B4-BE49-F238E27FC236}">
-                <a16:creationId xmlns:a16="http://schemas.microsoft.com/office/drawing/2014/main" id="{BEE95A8D-7B80-1870-2601-6623352B20D6}"/>
+                <a16:creationId xmlns:a16="http://schemas.microsoft.com/office/drawing/2014/main" id="{4A9D1F52-D9A9-9FC0-FE1E-BA6A467F6EF6}"/>
               </a:ext>
             </a:extLst>
           </p:cNvPr>
@@ -5191,7 +5191,7 @@
           <p:cNvPr id="4" name="テキスト ボックス 3">
             <a:extLst>
               <a:ext uri="{FF2B5EF4-FFF2-40B4-BE49-F238E27FC236}">
-                <a16:creationId xmlns:a16="http://schemas.microsoft.com/office/drawing/2014/main" id="{DDB80CC2-3886-40F4-F98F-19041B898B64}"/>
+                <a16:creationId xmlns:a16="http://schemas.microsoft.com/office/drawing/2014/main" id="{0906C862-B464-83A2-F503-7704D4E301E7}"/>
               </a:ext>
             </a:extLst>
           </p:cNvPr>
@@ -5215,20 +5215,14 @@
           <a:lstStyle/>
           <a:p>
             <a:r>
-              <a:rPr kumimoji="1" lang="en-US" altLang="ja-JP" sz="2000">
+              <a:rPr kumimoji="1" lang="ja-JP" altLang="en-US" sz="2000">
                 <a:solidFill>
                   <a:srgbClr val="333333"/>
                 </a:solidFill>
                 <a:latin typeface="Arial" panose="020B0604020202020204" pitchFamily="34" charset="0"/>
               </a:rPr>
-              <a:t>Set confirmed custom domain</a:t>
-            </a:r>
-            <a:endParaRPr kumimoji="1" lang="ja-JP" altLang="en-US" sz="2000">
-              <a:solidFill>
-                <a:srgbClr val="333333"/>
-              </a:solidFill>
-              <a:latin typeface="Arial" panose="020B0604020202020204" pitchFamily="34" charset="0"/>
-            </a:endParaRPr>
+              <a:t>直近のコミットでは、実装の見直しと継続的な改善が行われました。</a:t>
+            </a:r>
           </a:p>
         </p:txBody>
       </p:sp>
@@ -5237,7 +5231,7 @@
           <p:cNvPr id="5" name="テキスト ボックス 4">
             <a:extLst>
               <a:ext uri="{FF2B5EF4-FFF2-40B4-BE49-F238E27FC236}">
-                <a16:creationId xmlns:a16="http://schemas.microsoft.com/office/drawing/2014/main" id="{9B63CE17-EAE5-1987-BABA-73E89E599E3D}"/>
+                <a16:creationId xmlns:a16="http://schemas.microsoft.com/office/drawing/2014/main" id="{86AD78CF-B266-BECA-9E78-79F25ED013F4}"/>
               </a:ext>
             </a:extLst>
           </p:cNvPr>
@@ -5284,7 +5278,7 @@
             <a:hlinkClick r:id="" action="ppaction://media"/>
             <a:extLst>
               <a:ext uri="{FF2B5EF4-FFF2-40B4-BE49-F238E27FC236}">
-                <a16:creationId xmlns:a16="http://schemas.microsoft.com/office/drawing/2014/main" id="{C2AF0D0B-B018-50BE-274E-6BCC7CF18B58}"/>
+                <a16:creationId xmlns:a16="http://schemas.microsoft.com/office/drawing/2014/main" id="{DCC24EF6-DC11-D54A-3087-177D9F85F1F6}"/>
               </a:ext>
             </a:extLst>
           </p:cNvPr>
@@ -5319,7 +5313,7 @@
     </p:spTree>
     <p:extLst>
       <p:ext uri="{BB962C8B-B14F-4D97-AF65-F5344CB8AC3E}">
-        <p14:creationId xmlns:p14="http://schemas.microsoft.com/office/powerpoint/2010/main" val="1582567517"/>
+        <p14:creationId xmlns:p14="http://schemas.microsoft.com/office/powerpoint/2010/main" val="1216796251"/>
       </p:ext>
     </p:extLst>
   </p:cSld>
@@ -5362,7 +5356,7 @@
                                   <p:childTnLst>
                                     <p:cmd type="call" cmd="playFrom(0.0)">
                                       <p:cBhvr>
-                                        <p:cTn id="6" dur="6451" fill="hold"/>
+                                        <p:cTn id="6" dur="6076" fill="hold"/>
                                         <p:tgtEl>
                                           <p:spTgt spid="6"/>
                                         </p:tgtEl>
@@ -5443,7 +5437,7 @@
           <p:cNvPr id="2" name="テキスト ボックス 1">
             <a:extLst>
               <a:ext uri="{FF2B5EF4-FFF2-40B4-BE49-F238E27FC236}">
-                <a16:creationId xmlns:a16="http://schemas.microsoft.com/office/drawing/2014/main" id="{47E6E88E-7C2A-4E7D-4E92-1F4BC026AA4B}"/>
+                <a16:creationId xmlns:a16="http://schemas.microsoft.com/office/drawing/2014/main" id="{4379B769-7BF1-8A14-FF0C-EF0051A3BF07}"/>
               </a:ext>
             </a:extLst>
           </p:cNvPr>
@@ -5489,7 +5483,7 @@
           <p:cNvPr id="3" name="テキスト ボックス 2">
             <a:extLst>
               <a:ext uri="{FF2B5EF4-FFF2-40B4-BE49-F238E27FC236}">
-                <a16:creationId xmlns:a16="http://schemas.microsoft.com/office/drawing/2014/main" id="{381F395A-C0E8-C9F4-16F7-E243B6E6BBBB}"/>
+                <a16:creationId xmlns:a16="http://schemas.microsoft.com/office/drawing/2014/main" id="{76482D87-0516-E208-1B69-945ACD75F97C}"/>
               </a:ext>
             </a:extLst>
           </p:cNvPr>
@@ -5529,7 +5523,7 @@
           <p:cNvPr id="4" name="テキスト ボックス 3">
             <a:extLst>
               <a:ext uri="{FF2B5EF4-FFF2-40B4-BE49-F238E27FC236}">
-                <a16:creationId xmlns:a16="http://schemas.microsoft.com/office/drawing/2014/main" id="{EC0C05C4-4727-82C9-6C1C-6ACD567539B8}"/>
+                <a16:creationId xmlns:a16="http://schemas.microsoft.com/office/drawing/2014/main" id="{6BF414D7-C43C-2E32-BF25-C01C9DB31A53}"/>
               </a:ext>
             </a:extLst>
           </p:cNvPr>
@@ -5594,7 +5588,7 @@
           <p:cNvPr id="5" name="テキスト ボックス 4">
             <a:extLst>
               <a:ext uri="{FF2B5EF4-FFF2-40B4-BE49-F238E27FC236}">
-                <a16:creationId xmlns:a16="http://schemas.microsoft.com/office/drawing/2014/main" id="{33A4BF32-4588-8643-31E6-FED6B5665E14}"/>
+                <a16:creationId xmlns:a16="http://schemas.microsoft.com/office/drawing/2014/main" id="{C6A70009-52C7-9AAE-6106-DF8A66539FD9}"/>
               </a:ext>
             </a:extLst>
           </p:cNvPr>
@@ -5641,7 +5635,7 @@
             <a:hlinkClick r:id="" action="ppaction://media"/>
             <a:extLst>
               <a:ext uri="{FF2B5EF4-FFF2-40B4-BE49-F238E27FC236}">
-                <a16:creationId xmlns:a16="http://schemas.microsoft.com/office/drawing/2014/main" id="{8DE914EE-598F-13C8-6A9F-8BC4118FC5E7}"/>
+                <a16:creationId xmlns:a16="http://schemas.microsoft.com/office/drawing/2014/main" id="{D7E70F0E-9F54-CF39-120A-079E424AE347}"/>
               </a:ext>
             </a:extLst>
           </p:cNvPr>
@@ -5676,7 +5670,7 @@
     </p:spTree>
     <p:extLst>
       <p:ext uri="{BB962C8B-B14F-4D97-AF65-F5344CB8AC3E}">
-        <p14:creationId xmlns:p14="http://schemas.microsoft.com/office/powerpoint/2010/main" val="2830825803"/>
+        <p14:creationId xmlns:p14="http://schemas.microsoft.com/office/powerpoint/2010/main" val="3157095564"/>
       </p:ext>
     </p:extLst>
   </p:cSld>
